--- a/.claude/tools/ppt/工作週報.pptx
+++ b/.claude/tools/ppt/工作週報.pptx
@@ -3131,7 +3131,7 @@
         </p:nvGraphicFramePr>
         <p:xfrm>
           <a:off x="365760" y="1005840"/>
-          <a:ext cx="4114800" cy="2880360"/>
+          <a:ext cx="4114800" cy="3200400"/>
         </p:xfrm>
         <a:graphic>
           <a:graphicData uri="http://schemas.openxmlformats.org/drawingml/2006/table">
@@ -3381,7 +3381,7 @@
                         </a:defRPr>
                       </a:pPr>
                       <a:r>
-                        <a:t>教育訓練</a:t>
+                        <a:t>AI流程調整</a:t>
                       </a:r>
                     </a:p>
                   </a:txBody>
@@ -3398,7 +3398,7 @@
                         </a:defRPr>
                       </a:pPr>
                       <a:r>
-                        <a:t>18.0hr (22.5%)</a:t>
+                        <a:t>13.5hr (16.9%)</a:t>
                       </a:r>
                     </a:p>
                   </a:txBody>
@@ -3415,7 +3415,7 @@
                         </a:defRPr>
                       </a:pPr>
                       <a:r>
-                        <a:t>7</a:t>
+                        <a:t>4</a:t>
                       </a:r>
                     </a:p>
                   </a:txBody>
@@ -3469,6 +3469,59 @@
                       </a:pPr>
                       <a:r>
                         <a:t>1</a:t>
+                      </a:r>
+                    </a:p>
+                  </a:txBody>
+                  <a:tcPr/>
+                </a:tc>
+              </a:tr>
+              <a:tr h="320040">
+                <a:tc>
+                  <a:txBody>
+                    <a:bodyPr/>
+                    <a:lstStyle/>
+                    <a:p>
+                      <a:pPr algn="ctr">
+                        <a:defRPr sz="1100">
+                          <a:latin typeface="Microsoft JhengHei"/>
+                        </a:defRPr>
+                      </a:pPr>
+                      <a:r>
+                        <a:t>教育訓練</a:t>
+                      </a:r>
+                    </a:p>
+                  </a:txBody>
+                  <a:tcPr/>
+                </a:tc>
+                <a:tc>
+                  <a:txBody>
+                    <a:bodyPr/>
+                    <a:lstStyle/>
+                    <a:p>
+                      <a:pPr algn="ctr">
+                        <a:defRPr sz="1100">
+                          <a:latin typeface="Microsoft JhengHei"/>
+                        </a:defRPr>
+                      </a:pPr>
+                      <a:r>
+                        <a:t>4.5hr (5.6%)</a:t>
+                      </a:r>
+                    </a:p>
+                  </a:txBody>
+                  <a:tcPr/>
+                </a:tc>
+                <a:tc>
+                  <a:txBody>
+                    <a:bodyPr/>
+                    <a:lstStyle/>
+                    <a:p>
+                      <a:pPr algn="ctr">
+                        <a:defRPr sz="1100">
+                          <a:latin typeface="Microsoft JhengHei"/>
+                        </a:defRPr>
+                      </a:pPr>
+                      <a:r>
+                        <a:t>3</a:t>
                       </a:r>
                     </a:p>
                   </a:txBody>
@@ -3756,7 +3809,7 @@
                         </a:defRPr>
                       </a:pPr>
                       <a:r>
-                        <a:t>鴻久用戶</a:t>
+                        <a:t>2508014 凌越生醫-商務管理平台</a:t>
                       </a:r>
                     </a:p>
                   </a:txBody>
@@ -3773,7 +3826,7 @@
                         </a:defRPr>
                       </a:pPr>
                       <a:r>
-                        <a:t>5</a:t>
+                        <a:t>2</a:t>
                       </a:r>
                     </a:p>
                   </a:txBody>
@@ -3792,7 +3845,7 @@
                         </a:defRPr>
                       </a:pPr>
                       <a:r>
-                        <a:t>2508014 凌越生醫-商務管理平台</a:t>
+                        <a:t>鴻久用戶</a:t>
                       </a:r>
                     </a:p>
                   </a:txBody>
@@ -3828,7 +3881,7 @@
         </p:nvSpPr>
         <p:spPr>
           <a:xfrm>
-            <a:off x="365760" y="4315968"/>
+            <a:off x="365760" y="4636008"/>
             <a:ext cx="8412480" cy="832104"/>
           </a:xfrm>
           <a:prstGeom prst="rect">
@@ -3858,7 +3911,7 @@
               </a:defRPr>
             </a:pPr>
             <a:r>
-              <a:t>1. 雙周會ppt產生完成</a:t>
+              <a:t>1. 雙周會ppt產生完成，目前是手動貼上，後續可考慮串接直接修改</a:t>
             </a:r>
           </a:p>
           <a:p>
@@ -3868,7 +3921,7 @@
               </a:defRPr>
             </a:pPr>
             <a:r>
-              <a:t>2. AI工作流增加service來源資料</a:t>
+              <a:t>2. AI工作流程已加上eService資料</a:t>
             </a:r>
           </a:p>
         </p:txBody>

--- a/.claude/tools/ppt/工作週報.pptx
+++ b/.claude/tools/ppt/工作週報.pptx
@@ -3116,7 +3116,7 @@
               </a:defRPr>
             </a:pPr>
             <a:r>
-              <a:t>過去兩周工作進度 05/18~05/29</a:t>
+              <a:t>過去兩周工作進度 05/25~06/05</a:t>
             </a:r>
           </a:p>
         </p:txBody>
@@ -3131,7 +3131,7 @@
         </p:nvGraphicFramePr>
         <p:xfrm>
           <a:off x="365760" y="1005840"/>
-          <a:ext cx="4114800" cy="3200400"/>
+          <a:ext cx="4114800" cy="2560320"/>
         </p:xfrm>
         <a:graphic>
           <a:graphicData uri="http://schemas.openxmlformats.org/drawingml/2006/table">
@@ -3159,7 +3159,7 @@
                         </a:defRPr>
                       </a:pPr>
                       <a:r>
-                        <a:t>過去兩周工作內容 05/18~05/29</a:t>
+                        <a:t>過去兩周工作內容 05/25~06/05</a:t>
                       </a:r>
                     </a:p>
                   </a:txBody>
@@ -3292,7 +3292,7 @@
                         </a:defRPr>
                       </a:pPr>
                       <a:r>
-                        <a:t>27.0hr (33.8%)</a:t>
+                        <a:t>52.6hr (66.0%)</a:t>
                       </a:r>
                     </a:p>
                   </a:txBody>
@@ -3309,7 +3309,7 @@
                         </a:defRPr>
                       </a:pPr>
                       <a:r>
-                        <a:t>11</a:t>
+                        <a:t>26</a:t>
                       </a:r>
                     </a:p>
                   </a:txBody>
@@ -3345,7 +3345,7 @@
                         </a:defRPr>
                       </a:pPr>
                       <a:r>
-                        <a:t>21.5hr (26.9%)</a:t>
+                        <a:t>11.0hr (13.8%)</a:t>
                       </a:r>
                     </a:p>
                   </a:txBody>
@@ -3362,7 +3362,7 @@
                         </a:defRPr>
                       </a:pPr>
                       <a:r>
-                        <a:t>5</a:t>
+                        <a:t>4</a:t>
                       </a:r>
                     </a:p>
                   </a:txBody>
@@ -3398,166 +3398,7 @@
                         </a:defRPr>
                       </a:pPr>
                       <a:r>
-                        <a:t>13.5hr (16.9%)</a:t>
-                      </a:r>
-                    </a:p>
-                  </a:txBody>
-                  <a:tcPr/>
-                </a:tc>
-                <a:tc>
-                  <a:txBody>
-                    <a:bodyPr/>
-                    <a:lstStyle/>
-                    <a:p>
-                      <a:pPr algn="ctr">
-                        <a:defRPr sz="1100">
-                          <a:latin typeface="Microsoft JhengHei"/>
-                        </a:defRPr>
-                      </a:pPr>
-                      <a:r>
-                        <a:t>4</a:t>
-                      </a:r>
-                    </a:p>
-                  </a:txBody>
-                  <a:tcPr/>
-                </a:tc>
-              </a:tr>
-              <a:tr h="320040">
-                <a:tc>
-                  <a:txBody>
-                    <a:bodyPr/>
-                    <a:lstStyle/>
-                    <a:p>
-                      <a:pPr algn="ctr">
-                        <a:defRPr sz="1100">
-                          <a:latin typeface="Microsoft JhengHei"/>
-                        </a:defRPr>
-                      </a:pPr>
-                      <a:r>
-                        <a:t>B2413內部-艾創點</a:t>
-                      </a:r>
-                    </a:p>
-                  </a:txBody>
-                  <a:tcPr/>
-                </a:tc>
-                <a:tc>
-                  <a:txBody>
-                    <a:bodyPr/>
-                    <a:lstStyle/>
-                    <a:p>
-                      <a:pPr algn="ctr">
-                        <a:defRPr sz="1100">
-                          <a:latin typeface="Microsoft JhengHei"/>
-                        </a:defRPr>
-                      </a:pPr>
-                      <a:r>
-                        <a:t>5.0hr (6.3%)</a:t>
-                      </a:r>
-                    </a:p>
-                  </a:txBody>
-                  <a:tcPr/>
-                </a:tc>
-                <a:tc>
-                  <a:txBody>
-                    <a:bodyPr/>
-                    <a:lstStyle/>
-                    <a:p>
-                      <a:pPr algn="ctr">
-                        <a:defRPr sz="1100">
-                          <a:latin typeface="Microsoft JhengHei"/>
-                        </a:defRPr>
-                      </a:pPr>
-                      <a:r>
-                        <a:t>1</a:t>
-                      </a:r>
-                    </a:p>
-                  </a:txBody>
-                  <a:tcPr/>
-                </a:tc>
-              </a:tr>
-              <a:tr h="320040">
-                <a:tc>
-                  <a:txBody>
-                    <a:bodyPr/>
-                    <a:lstStyle/>
-                    <a:p>
-                      <a:pPr algn="ctr">
-                        <a:defRPr sz="1100">
-                          <a:latin typeface="Microsoft JhengHei"/>
-                        </a:defRPr>
-                      </a:pPr>
-                      <a:r>
-                        <a:t>教育訓練</a:t>
-                      </a:r>
-                    </a:p>
-                  </a:txBody>
-                  <a:tcPr/>
-                </a:tc>
-                <a:tc>
-                  <a:txBody>
-                    <a:bodyPr/>
-                    <a:lstStyle/>
-                    <a:p>
-                      <a:pPr algn="ctr">
-                        <a:defRPr sz="1100">
-                          <a:latin typeface="Microsoft JhengHei"/>
-                        </a:defRPr>
-                      </a:pPr>
-                      <a:r>
-                        <a:t>4.5hr (5.6%)</a:t>
-                      </a:r>
-                    </a:p>
-                  </a:txBody>
-                  <a:tcPr/>
-                </a:tc>
-                <a:tc>
-                  <a:txBody>
-                    <a:bodyPr/>
-                    <a:lstStyle/>
-                    <a:p>
-                      <a:pPr algn="ctr">
-                        <a:defRPr sz="1100">
-                          <a:latin typeface="Microsoft JhengHei"/>
-                        </a:defRPr>
-                      </a:pPr>
-                      <a:r>
-                        <a:t>3</a:t>
-                      </a:r>
-                    </a:p>
-                  </a:txBody>
-                  <a:tcPr/>
-                </a:tc>
-              </a:tr>
-              <a:tr h="320040">
-                <a:tc>
-                  <a:txBody>
-                    <a:bodyPr/>
-                    <a:lstStyle/>
-                    <a:p>
-                      <a:pPr algn="ctr">
-                        <a:defRPr sz="1100">
-                          <a:latin typeface="Microsoft JhengHei"/>
-                        </a:defRPr>
-                      </a:pPr>
-                      <a:r>
-                        <a:t>2508014 凌越生醫-商務管理平台</a:t>
-                      </a:r>
-                    </a:p>
-                  </a:txBody>
-                  <a:tcPr/>
-                </a:tc>
-                <a:tc>
-                  <a:txBody>
-                    <a:bodyPr/>
-                    <a:lstStyle/>
-                    <a:p>
-                      <a:pPr algn="ctr">
-                        <a:defRPr sz="1100">
-                          <a:latin typeface="Microsoft JhengHei"/>
-                        </a:defRPr>
-                      </a:pPr>
-                      <a:r>
-                        <a:t>4.4hr (5.5%)</a:t>
+                        <a:t>7.7hr (9.7%)</a:t>
                       </a:r>
                     </a:p>
                   </a:txBody>
@@ -3610,7 +3451,7 @@
                         </a:defRPr>
                       </a:pPr>
                       <a:r>
-                        <a:t>2.5hr (3.1%)</a:t>
+                        <a:t>4.0hr (5.1%)</a:t>
                       </a:r>
                     </a:p>
                   </a:txBody>
@@ -3627,7 +3468,7 @@
                         </a:defRPr>
                       </a:pPr>
                       <a:r>
-                        <a:t>1</a:t>
+                        <a:t>4</a:t>
                       </a:r>
                     </a:p>
                   </a:txBody>
@@ -3646,7 +3487,60 @@
                         </a:defRPr>
                       </a:pPr>
                       <a:r>
-                        <a:t>A11-Odoo產品功能研發</a:t>
+                        <a:t>2508014 凌越生醫-商務管理平台</a:t>
+                      </a:r>
+                    </a:p>
+                  </a:txBody>
+                  <a:tcPr/>
+                </a:tc>
+                <a:tc>
+                  <a:txBody>
+                    <a:bodyPr/>
+                    <a:lstStyle/>
+                    <a:p>
+                      <a:pPr algn="ctr">
+                        <a:defRPr sz="1100">
+                          <a:latin typeface="Microsoft JhengHei"/>
+                        </a:defRPr>
+                      </a:pPr>
+                      <a:r>
+                        <a:t>2.9hr (3.6%)</a:t>
+                      </a:r>
+                    </a:p>
+                  </a:txBody>
+                  <a:tcPr/>
+                </a:tc>
+                <a:tc>
+                  <a:txBody>
+                    <a:bodyPr/>
+                    <a:lstStyle/>
+                    <a:p>
+                      <a:pPr algn="ctr">
+                        <a:defRPr sz="1100">
+                          <a:latin typeface="Microsoft JhengHei"/>
+                        </a:defRPr>
+                      </a:pPr>
+                      <a:r>
+                        <a:t>4</a:t>
+                      </a:r>
+                    </a:p>
+                  </a:txBody>
+                  <a:tcPr/>
+                </a:tc>
+              </a:tr>
+              <a:tr h="320040">
+                <a:tc>
+                  <a:txBody>
+                    <a:bodyPr/>
+                    <a:lstStyle/>
+                    <a:p>
+                      <a:pPr algn="ctr">
+                        <a:defRPr sz="1100">
+                          <a:latin typeface="Microsoft JhengHei"/>
+                        </a:defRPr>
+                      </a:pPr>
+                      <a:r>
+                        <a:t>教育訓練</a:t>
                       </a:r>
                     </a:p>
                   </a:txBody>
@@ -3701,7 +3595,7 @@
         </p:nvGraphicFramePr>
         <p:xfrm>
           <a:off x="4663440" y="1005840"/>
-          <a:ext cx="4114800" cy="1280160"/>
+          <a:ext cx="4114800" cy="960120"/>
         </p:xfrm>
         <a:graphic>
           <a:graphicData uri="http://schemas.openxmlformats.org/drawingml/2006/table">
@@ -3809,42 +3703,6 @@
                         </a:defRPr>
                       </a:pPr>
                       <a:r>
-                        <a:t>2508014 凌越生醫-商務管理平台</a:t>
-                      </a:r>
-                    </a:p>
-                  </a:txBody>
-                  <a:tcPr/>
-                </a:tc>
-                <a:tc>
-                  <a:txBody>
-                    <a:bodyPr/>
-                    <a:lstStyle/>
-                    <a:p>
-                      <a:pPr algn="ctr">
-                        <a:defRPr sz="1100">
-                          <a:latin typeface="Microsoft JhengHei"/>
-                        </a:defRPr>
-                      </a:pPr>
-                      <a:r>
-                        <a:t>2</a:t>
-                      </a:r>
-                    </a:p>
-                  </a:txBody>
-                  <a:tcPr/>
-                </a:tc>
-              </a:tr>
-              <a:tr h="320040">
-                <a:tc>
-                  <a:txBody>
-                    <a:bodyPr/>
-                    <a:lstStyle/>
-                    <a:p>
-                      <a:pPr algn="ctr">
-                        <a:defRPr sz="1100">
-                          <a:latin typeface="Microsoft JhengHei"/>
-                        </a:defRPr>
-                      </a:pPr>
-                      <a:r>
                         <a:t>鴻久用戶</a:t>
                       </a:r>
                     </a:p>
@@ -3862,7 +3720,7 @@
                         </a:defRPr>
                       </a:pPr>
                       <a:r>
-                        <a:t>2</a:t>
+                        <a:t>3</a:t>
                       </a:r>
                     </a:p>
                   </a:txBody>
@@ -3881,7 +3739,7 @@
         </p:nvSpPr>
         <p:spPr>
           <a:xfrm>
-            <a:off x="365760" y="4636008"/>
+            <a:off x="365760" y="3995928"/>
             <a:ext cx="8412480" cy="832104"/>
           </a:xfrm>
           <a:prstGeom prst="rect">
@@ -3911,7 +3769,7 @@
               </a:defRPr>
             </a:pPr>
             <a:r>
-              <a:t>1. 雙周會ppt產生完成，目前是手動貼上，後續可考慮串接直接修改</a:t>
+              <a:t>1. 雙周會ppt產生完成，目前是手動貼上，後續可考慮串接修改</a:t>
             </a:r>
           </a:p>
           <a:p>

--- a/.claude/tools/ppt/工作週報.pptx
+++ b/.claude/tools/ppt/工作週報.pptx
@@ -3116,7 +3116,7 @@
               </a:defRPr>
             </a:pPr>
             <a:r>
-              <a:t>過去兩周工作進度 05/25~06/05</a:t>
+              <a:t>過去兩周工作進度 06/08~06/19</a:t>
             </a:r>
           </a:p>
         </p:txBody>
@@ -3131,7 +3131,7 @@
         </p:nvGraphicFramePr>
         <p:xfrm>
           <a:off x="365760" y="1005840"/>
-          <a:ext cx="4114800" cy="2560320"/>
+          <a:ext cx="4114800" cy="2240280"/>
         </p:xfrm>
         <a:graphic>
           <a:graphicData uri="http://schemas.openxmlformats.org/drawingml/2006/table">
@@ -3159,7 +3159,7 @@
                         </a:defRPr>
                       </a:pPr>
                       <a:r>
-                        <a:t>過去兩周工作內容 05/25~06/05</a:t>
+                        <a:t>過去兩周工作內容 06/08~06/19</a:t>
                       </a:r>
                     </a:p>
                   </a:txBody>
@@ -3292,7 +3292,7 @@
                         </a:defRPr>
                       </a:pPr>
                       <a:r>
-                        <a:t>52.6hr (66.0%)</a:t>
+                        <a:t>39.9hr (56.2%)</a:t>
                       </a:r>
                     </a:p>
                   </a:txBody>
@@ -3309,7 +3309,7 @@
                         </a:defRPr>
                       </a:pPr>
                       <a:r>
-                        <a:t>26</a:t>
+                        <a:t>27</a:t>
                       </a:r>
                     </a:p>
                   </a:txBody>
@@ -3345,7 +3345,60 @@
                         </a:defRPr>
                       </a:pPr>
                       <a:r>
-                        <a:t>11.0hr (13.8%)</a:t>
+                        <a:t>10.5hr (14.8%)</a:t>
+                      </a:r>
+                    </a:p>
+                  </a:txBody>
+                  <a:tcPr/>
+                </a:tc>
+                <a:tc>
+                  <a:txBody>
+                    <a:bodyPr/>
+                    <a:lstStyle/>
+                    <a:p>
+                      <a:pPr algn="ctr">
+                        <a:defRPr sz="1100">
+                          <a:latin typeface="Microsoft JhengHei"/>
+                        </a:defRPr>
+                      </a:pPr>
+                      <a:r>
+                        <a:t>5</a:t>
+                      </a:r>
+                    </a:p>
+                  </a:txBody>
+                  <a:tcPr/>
+                </a:tc>
+              </a:tr>
+              <a:tr h="320040">
+                <a:tc>
+                  <a:txBody>
+                    <a:bodyPr/>
+                    <a:lstStyle/>
+                    <a:p>
+                      <a:pPr algn="ctr">
+                        <a:defRPr sz="1100">
+                          <a:latin typeface="Microsoft JhengHei"/>
+                        </a:defRPr>
+                      </a:pPr>
+                      <a:r>
+                        <a:t>2503037鴻久科技_維修管</a:t>
+                      </a:r>
+                    </a:p>
+                  </a:txBody>
+                  <a:tcPr/>
+                </a:tc>
+                <a:tc>
+                  <a:txBody>
+                    <a:bodyPr/>
+                    <a:lstStyle/>
+                    <a:p>
+                      <a:pPr algn="ctr">
+                        <a:defRPr sz="1100">
+                          <a:latin typeface="Microsoft JhengHei"/>
+                        </a:defRPr>
+                      </a:pPr>
+                      <a:r>
+                        <a:t>8.6hr (12.1%)</a:t>
                       </a:r>
                     </a:p>
                   </a:txBody>
@@ -3398,7 +3451,7 @@
                         </a:defRPr>
                       </a:pPr>
                       <a:r>
-                        <a:t>7.7hr (9.7%)</a:t>
+                        <a:t>6.3hr (8.9%)</a:t>
                       </a:r>
                     </a:p>
                   </a:txBody>
@@ -3415,113 +3468,7 @@
                         </a:defRPr>
                       </a:pPr>
                       <a:r>
-                        <a:t>4</a:t>
-                      </a:r>
-                    </a:p>
-                  </a:txBody>
-                  <a:tcPr/>
-                </a:tc>
-              </a:tr>
-              <a:tr h="320040">
-                <a:tc>
-                  <a:txBody>
-                    <a:bodyPr/>
-                    <a:lstStyle/>
-                    <a:p>
-                      <a:pPr algn="ctr">
-                        <a:defRPr sz="1100">
-                          <a:latin typeface="Microsoft JhengHei"/>
-                        </a:defRPr>
-                      </a:pPr>
-                      <a:r>
-                        <a:t>2503037鴻久科技_維修管</a:t>
-                      </a:r>
-                    </a:p>
-                  </a:txBody>
-                  <a:tcPr/>
-                </a:tc>
-                <a:tc>
-                  <a:txBody>
-                    <a:bodyPr/>
-                    <a:lstStyle/>
-                    <a:p>
-                      <a:pPr algn="ctr">
-                        <a:defRPr sz="1100">
-                          <a:latin typeface="Microsoft JhengHei"/>
-                        </a:defRPr>
-                      </a:pPr>
-                      <a:r>
-                        <a:t>4.0hr (5.1%)</a:t>
-                      </a:r>
-                    </a:p>
-                  </a:txBody>
-                  <a:tcPr/>
-                </a:tc>
-                <a:tc>
-                  <a:txBody>
-                    <a:bodyPr/>
-                    <a:lstStyle/>
-                    <a:p>
-                      <a:pPr algn="ctr">
-                        <a:defRPr sz="1100">
-                          <a:latin typeface="Microsoft JhengHei"/>
-                        </a:defRPr>
-                      </a:pPr>
-                      <a:r>
-                        <a:t>4</a:t>
-                      </a:r>
-                    </a:p>
-                  </a:txBody>
-                  <a:tcPr/>
-                </a:tc>
-              </a:tr>
-              <a:tr h="320040">
-                <a:tc>
-                  <a:txBody>
-                    <a:bodyPr/>
-                    <a:lstStyle/>
-                    <a:p>
-                      <a:pPr algn="ctr">
-                        <a:defRPr sz="1100">
-                          <a:latin typeface="Microsoft JhengHei"/>
-                        </a:defRPr>
-                      </a:pPr>
-                      <a:r>
-                        <a:t>2508014 凌越生醫-商務管理平台</a:t>
-                      </a:r>
-                    </a:p>
-                  </a:txBody>
-                  <a:tcPr/>
-                </a:tc>
-                <a:tc>
-                  <a:txBody>
-                    <a:bodyPr/>
-                    <a:lstStyle/>
-                    <a:p>
-                      <a:pPr algn="ctr">
-                        <a:defRPr sz="1100">
-                          <a:latin typeface="Microsoft JhengHei"/>
-                        </a:defRPr>
-                      </a:pPr>
-                      <a:r>
-                        <a:t>2.9hr (3.6%)</a:t>
-                      </a:r>
-                    </a:p>
-                  </a:txBody>
-                  <a:tcPr/>
-                </a:tc>
-                <a:tc>
-                  <a:txBody>
-                    <a:bodyPr/>
-                    <a:lstStyle/>
-                    <a:p>
-                      <a:pPr algn="ctr">
-                        <a:defRPr sz="1100">
-                          <a:latin typeface="Microsoft JhengHei"/>
-                        </a:defRPr>
-                      </a:pPr>
-                      <a:r>
-                        <a:t>4</a:t>
+                        <a:t>1</a:t>
                       </a:r>
                     </a:p>
                   </a:txBody>
@@ -3557,7 +3504,7 @@
                         </a:defRPr>
                       </a:pPr>
                       <a:r>
-                        <a:t>1.5hr (1.9%)</a:t>
+                        <a:t>5.7hr (8.0%)</a:t>
                       </a:r>
                     </a:p>
                   </a:txBody>
@@ -3595,7 +3542,7 @@
         </p:nvGraphicFramePr>
         <p:xfrm>
           <a:off x="4663440" y="1005840"/>
-          <a:ext cx="4114800" cy="960120"/>
+          <a:ext cx="4114800" cy="1280160"/>
         </p:xfrm>
         <a:graphic>
           <a:graphicData uri="http://schemas.openxmlformats.org/drawingml/2006/table">
@@ -3703,6 +3650,42 @@
                         </a:defRPr>
                       </a:pPr>
                       <a:r>
+                        <a:t>2503037鴻久科技_維修管</a:t>
+                      </a:r>
+                    </a:p>
+                  </a:txBody>
+                  <a:tcPr/>
+                </a:tc>
+                <a:tc>
+                  <a:txBody>
+                    <a:bodyPr/>
+                    <a:lstStyle/>
+                    <a:p>
+                      <a:pPr algn="ctr">
+                        <a:defRPr sz="1100">
+                          <a:latin typeface="Microsoft JhengHei"/>
+                        </a:defRPr>
+                      </a:pPr>
+                      <a:r>
+                        <a:t>9</a:t>
+                      </a:r>
+                    </a:p>
+                  </a:txBody>
+                  <a:tcPr/>
+                </a:tc>
+              </a:tr>
+              <a:tr h="320040">
+                <a:tc>
+                  <a:txBody>
+                    <a:bodyPr/>
+                    <a:lstStyle/>
+                    <a:p>
+                      <a:pPr algn="ctr">
+                        <a:defRPr sz="1100">
+                          <a:latin typeface="Microsoft JhengHei"/>
+                        </a:defRPr>
+                      </a:pPr>
+                      <a:r>
                         <a:t>鴻久用戶</a:t>
                       </a:r>
                     </a:p>
@@ -3720,7 +3703,7 @@
                         </a:defRPr>
                       </a:pPr>
                       <a:r>
-                        <a:t>3</a:t>
+                        <a:t>1</a:t>
                       </a:r>
                     </a:p>
                   </a:txBody>
@@ -3739,7 +3722,7 @@
         </p:nvSpPr>
         <p:spPr>
           <a:xfrm>
-            <a:off x="365760" y="3995928"/>
+            <a:off x="365760" y="3675888"/>
             <a:ext cx="8412480" cy="832104"/>
           </a:xfrm>
           <a:prstGeom prst="rect">
